--- a/docs/etapa-5/pessoa-4/apresentacao/CoreMotion-Pitch-animado.pptx
+++ b/docs/etapa-5/pessoa-4/apresentacao/CoreMotion-Pitch-animado.pptx
@@ -4512,20 +4512,22 @@
       <p:grpSpPr/>
       <p:sp>
         <p:nvSpPr>
-          <p:cNvPr id="2" name="Rectangle 1"/>
+          <p:cNvPr id="2" name="Oval 1"/>
           <p:cNvSpPr/>
           <p:nvPr/>
         </p:nvSpPr>
         <p:spPr>
           <a:xfrm>
-            <a:off x="-1554480" y="-1737360"/>
-            <a:ext cx="5669280" cy="5669280"/>
+            <a:off x="8595360" y="-2468880"/>
+            <a:ext cx="4937760" cy="4937760"/>
           </a:xfrm>
-          <a:prstGeom prst="rect">
+          <a:prstGeom prst="ellipse">
             <a:avLst/>
           </a:prstGeom>
           <a:solidFill>
-            <a:srgbClr val="6C4CF1"/>
+            <a:srgbClr val="6C4CF1">
+              <a:alpha val="26000"/>
+            </a:srgbClr>
           </a:solidFill>
           <a:ln>
             <a:noFill/>
@@ -4556,20 +4558,22 @@
       </p:sp>
       <p:sp>
         <p:nvSpPr>
-          <p:cNvPr id="3" name="Rectangle 2"/>
+          <p:cNvPr id="3" name="Oval 2"/>
           <p:cNvSpPr/>
           <p:nvPr/>
         </p:nvSpPr>
         <p:spPr>
           <a:xfrm>
-            <a:off x="8778240" y="4023360"/>
-            <a:ext cx="4754880" cy="4754880"/>
+            <a:off x="-2286000" y="4114800"/>
+            <a:ext cx="4572000" cy="4572000"/>
           </a:xfrm>
-          <a:prstGeom prst="rect">
+          <a:prstGeom prst="ellipse">
             <a:avLst/>
           </a:prstGeom>
           <a:solidFill>
-            <a:srgbClr val="C6F24E"/>
+            <a:srgbClr val="C6F24E">
+              <a:alpha val="16000"/>
+            </a:srgbClr>
           </a:solidFill>
           <a:ln>
             <a:noFill/>
@@ -7485,7 +7489,7 @@
         <p:spPr>
           <a:xfrm>
             <a:off x="457200" y="694944"/>
-            <a:ext cx="5943600" cy="658368"/>
+            <a:ext cx="11274552" cy="658368"/>
           </a:xfrm>
           <a:prstGeom prst="rect">
             <a:avLst/>
@@ -8541,8 +8545,8 @@
         </p:nvSpPr>
         <p:spPr>
           <a:xfrm>
-            <a:off x="457200" y="1600200"/>
-            <a:ext cx="11274552" cy="777240"/>
+            <a:off x="457200" y="1572768"/>
+            <a:ext cx="11274552" cy="914400"/>
           </a:xfrm>
           <a:prstGeom prst="roundRect">
             <a:avLst>
@@ -8605,8 +8609,8 @@
         </p:nvSpPr>
         <p:spPr>
           <a:xfrm>
-            <a:off x="457200" y="2496312"/>
-            <a:ext cx="11274552" cy="777240"/>
+            <a:off x="457200" y="2606039"/>
+            <a:ext cx="11274552" cy="914400"/>
           </a:xfrm>
           <a:prstGeom prst="roundRect">
             <a:avLst>
@@ -8669,8 +8673,8 @@
         </p:nvSpPr>
         <p:spPr>
           <a:xfrm>
-            <a:off x="457200" y="3392424"/>
-            <a:ext cx="11274552" cy="777240"/>
+            <a:off x="457200" y="3639311"/>
+            <a:ext cx="11274552" cy="914400"/>
           </a:xfrm>
           <a:prstGeom prst="roundRect">
             <a:avLst>
@@ -8733,8 +8737,8 @@
         </p:nvSpPr>
         <p:spPr>
           <a:xfrm>
-            <a:off x="457200" y="4288536"/>
-            <a:ext cx="11274552" cy="777240"/>
+            <a:off x="457200" y="4672583"/>
+            <a:ext cx="11274552" cy="914400"/>
           </a:xfrm>
           <a:prstGeom prst="roundRect">
             <a:avLst>
@@ -8797,8 +8801,8 @@
         </p:nvSpPr>
         <p:spPr>
           <a:xfrm>
-            <a:off x="457200" y="5394960"/>
-            <a:ext cx="11274552" cy="685800"/>
+            <a:off x="457200" y="5806440"/>
+            <a:ext cx="11274552" cy="566928"/>
           </a:xfrm>
           <a:prstGeom prst="rect">
             <a:avLst/>
@@ -9736,8 +9740,8 @@
         </p:nvSpPr>
         <p:spPr>
           <a:xfrm>
-            <a:off x="457200" y="4434840"/>
-            <a:ext cx="11274552" cy="914400"/>
+            <a:off x="457200" y="4709160"/>
+            <a:ext cx="11274552" cy="960120"/>
           </a:xfrm>
           <a:prstGeom prst="rect">
             <a:avLst/>
@@ -10195,20 +10199,22 @@
       <p:grpSpPr/>
       <p:sp>
         <p:nvSpPr>
-          <p:cNvPr id="2" name="Rectangle 1"/>
+          <p:cNvPr id="2" name="Oval 1"/>
           <p:cNvSpPr/>
           <p:nvPr/>
         </p:nvSpPr>
         <p:spPr>
           <a:xfrm>
-            <a:off x="6949440" y="-2011680"/>
-            <a:ext cx="5852160" cy="5852160"/>
+            <a:off x="9509760" y="4023360"/>
+            <a:ext cx="4206240" cy="4206240"/>
           </a:xfrm>
-          <a:prstGeom prst="rect">
+          <a:prstGeom prst="ellipse">
             <a:avLst/>
           </a:prstGeom>
           <a:solidFill>
-            <a:srgbClr val="6C4CF1"/>
+            <a:srgbClr val="6C4CF1">
+              <a:alpha val="28000"/>
+            </a:srgbClr>
           </a:solidFill>
           <a:ln>
             <a:noFill/>
@@ -10239,7 +10245,53 @@
       </p:sp>
       <p:sp>
         <p:nvSpPr>
-          <p:cNvPr id="3" name="Rectangle 2"/>
+          <p:cNvPr id="3" name="Oval 2"/>
+          <p:cNvSpPr/>
+          <p:nvPr/>
+        </p:nvSpPr>
+        <p:spPr>
+          <a:xfrm>
+            <a:off x="-2011680" y="-2377440"/>
+            <a:ext cx="4206240" cy="4206240"/>
+          </a:xfrm>
+          <a:prstGeom prst="ellipse">
+            <a:avLst/>
+          </a:prstGeom>
+          <a:solidFill>
+            <a:srgbClr val="C6F24E">
+              <a:alpha val="14000"/>
+            </a:srgbClr>
+          </a:solidFill>
+          <a:ln>
+            <a:noFill/>
+          </a:ln>
+          <a:effectLst/>
+        </p:spPr>
+        <p:style>
+          <a:lnRef idx="1">
+            <a:schemeClr val="accent1"/>
+          </a:lnRef>
+          <a:fillRef idx="3">
+            <a:schemeClr val="accent1"/>
+          </a:fillRef>
+          <a:effectRef idx="2">
+            <a:schemeClr val="accent1"/>
+          </a:effectRef>
+          <a:fontRef idx="minor">
+            <a:schemeClr val="lt1"/>
+          </a:fontRef>
+        </p:style>
+        <p:txBody>
+          <a:bodyPr rtlCol="0" anchor="ctr" wrap="square"/>
+          <a:lstStyle/>
+          <a:p>
+            <a:pPr algn="ctr"/>
+          </a:p>
+        </p:txBody>
+      </p:sp>
+      <p:sp>
+        <p:nvSpPr>
+          <p:cNvPr id="4" name="Rectangle 3"/>
           <p:cNvSpPr/>
           <p:nvPr/>
         </p:nvSpPr>
@@ -10299,14 +10351,14 @@
       </p:sp>
       <p:sp>
         <p:nvSpPr>
-          <p:cNvPr id="4" name="Rectangle 3"/>
+          <p:cNvPr id="5" name="Rectangle 4"/>
           <p:cNvSpPr/>
           <p:nvPr/>
         </p:nvSpPr>
         <p:spPr>
           <a:xfrm>
             <a:off x="457200" y="694944"/>
-            <a:ext cx="6400800" cy="658368"/>
+            <a:ext cx="11274552" cy="658368"/>
           </a:xfrm>
           <a:prstGeom prst="rect">
             <a:avLst/>
@@ -10357,7 +10409,7 @@
       </p:sp>
       <p:sp>
         <p:nvSpPr>
-          <p:cNvPr id="5" name="Rounded Rectangle 4"/>
+          <p:cNvPr id="6" name="Rounded Rectangle 5"/>
           <p:cNvSpPr/>
           <p:nvPr/>
         </p:nvSpPr>
@@ -10440,7 +10492,7 @@
       </p:sp>
       <p:sp>
         <p:nvSpPr>
-          <p:cNvPr id="6" name="Rounded Rectangle 5"/>
+          <p:cNvPr id="7" name="Rounded Rectangle 6"/>
           <p:cNvSpPr/>
           <p:nvPr/>
         </p:nvSpPr>
@@ -10523,7 +10575,7 @@
       </p:sp>
       <p:sp>
         <p:nvSpPr>
-          <p:cNvPr id="7" name="Rounded Rectangle 6"/>
+          <p:cNvPr id="8" name="Rounded Rectangle 7"/>
           <p:cNvSpPr/>
           <p:nvPr/>
         </p:nvSpPr>
@@ -10606,7 +10658,7 @@
       </p:sp>
       <p:sp>
         <p:nvSpPr>
-          <p:cNvPr id="8" name="Rectangle 7"/>
+          <p:cNvPr id="9" name="Rectangle 8"/>
           <p:cNvSpPr/>
           <p:nvPr/>
         </p:nvSpPr>
@@ -10979,6 +11031,62 @@
                       </p:childTnLst>
                     </p:cTn>
                   </p:par>
+                  <p:par>
+                    <p:cTn id="27" fill="hold">
+                      <p:stCondLst>
+                        <p:cond delay="indefinite"/>
+                      </p:stCondLst>
+                      <p:childTnLst>
+                        <p:par>
+                          <p:cTn id="28" fill="hold">
+                            <p:stCondLst>
+                              <p:cond delay="0"/>
+                            </p:stCondLst>
+                            <p:childTnLst>
+                              <p:par>
+                                <p:cTn id="29" presetID="10" presetClass="entr" presetSubtype="0" fill="hold" grpId="5" nodeType="clickEffect">
+                                  <p:stCondLst>
+                                    <p:cond delay="0"/>
+                                  </p:stCondLst>
+                                  <p:childTnLst>
+                                    <p:set>
+                                      <p:cBhvr>
+                                        <p:cTn id="30" dur="1" fill="hold">
+                                          <p:stCondLst>
+                                            <p:cond delay="0"/>
+                                          </p:stCondLst>
+                                        </p:cTn>
+                                        <p:tgtEl>
+                                          <p:spTgt spid="9"/>
+                                        </p:tgtEl>
+                                        <p:attrNameLst>
+                                          <p:attrName>style.visibility</p:attrName>
+                                        </p:attrNameLst>
+                                      </p:cBhvr>
+                                      <p:to>
+                                        <p:strVal val="visible"/>
+                                      </p:to>
+                                    </p:set>
+                                    <p:animEffect transition="in" filter="fade">
+                                      <p:cBhvr>
+                                        <p:cTn id="31" dur="520"/>
+                                        <p:tgtEl>
+                                          <p:spTgt spid="9"/>
+                                        </p:tgtEl>
+                                        <p:attrNameLst>
+                                          <p:attrName>style.visibility</p:attrName>
+                                        </p:attrNameLst>
+                                      </p:cBhvr>
+                                    </p:animEffect>
+                                  </p:childTnLst>
+                                </p:cTn>
+                              </p:par>
+                            </p:childTnLst>
+                          </p:cTn>
+                        </p:par>
+                      </p:childTnLst>
+                    </p:cTn>
+                  </p:par>
                 </p:childTnLst>
               </p:cTn>
               <p:prevCondLst>
@@ -11006,6 +11114,7 @@
       <p:bldP spid="6" grpId="2" build="p"/>
       <p:bldP spid="7" grpId="3" build="p"/>
       <p:bldP spid="8" grpId="4" build="p"/>
+      <p:bldP spid="9" grpId="5" build="p"/>
     </p:bldLst>
   </p:timing>
 </p:sld>
@@ -11156,7 +11265,7 @@
         <p:spPr>
           <a:xfrm>
             <a:off x="457200" y="1627632"/>
-            <a:ext cx="5486400" cy="1600200"/>
+            <a:ext cx="5486400" cy="1481328"/>
           </a:xfrm>
           <a:prstGeom prst="roundRect">
             <a:avLst>
@@ -11200,7 +11309,7 @@
               </a:spcAft>
             </a:pPr>
             <a:r>
-              <a:rPr sz="1100" b="1">
+              <a:rPr sz="1150" b="1">
                 <a:solidFill>
                   <a:srgbClr val="0B1020"/>
                 </a:solidFill>
@@ -11219,7 +11328,7 @@
               </a:spcAft>
             </a:pPr>
             <a:r>
-              <a:rPr sz="1200" b="0">
+              <a:rPr sz="1250" b="0">
                 <a:solidFill>
                   <a:srgbClr val="0B1020"/>
                 </a:solidFill>
@@ -11239,7 +11348,7 @@
         <p:spPr>
           <a:xfrm>
             <a:off x="6245352" y="1627632"/>
-            <a:ext cx="5486400" cy="1600200"/>
+            <a:ext cx="5486400" cy="1481328"/>
           </a:xfrm>
           <a:prstGeom prst="roundRect">
             <a:avLst>
@@ -11283,7 +11392,7 @@
               </a:spcAft>
             </a:pPr>
             <a:r>
-              <a:rPr sz="1100" b="1">
+              <a:rPr sz="1150" b="1">
                 <a:solidFill>
                   <a:srgbClr val="0B1020"/>
                 </a:solidFill>
@@ -11302,7 +11411,7 @@
               </a:spcAft>
             </a:pPr>
             <a:r>
-              <a:rPr sz="1200" b="0">
+              <a:rPr sz="1250" b="0">
                 <a:solidFill>
                   <a:srgbClr val="0B1020"/>
                 </a:solidFill>
@@ -11321,8 +11430,8 @@
         </p:nvSpPr>
         <p:spPr>
           <a:xfrm>
-            <a:off x="457200" y="3529584"/>
-            <a:ext cx="5486400" cy="1600200"/>
+            <a:off x="457200" y="3410712"/>
+            <a:ext cx="5486400" cy="1481328"/>
           </a:xfrm>
           <a:prstGeom prst="roundRect">
             <a:avLst>
@@ -11366,7 +11475,7 @@
               </a:spcAft>
             </a:pPr>
             <a:r>
-              <a:rPr sz="1100" b="1">
+              <a:rPr sz="1150" b="1">
                 <a:solidFill>
                   <a:srgbClr val="0B1020"/>
                 </a:solidFill>
@@ -11385,7 +11494,7 @@
               </a:spcAft>
             </a:pPr>
             <a:r>
-              <a:rPr sz="1200" b="0">
+              <a:rPr sz="1250" b="0">
                 <a:solidFill>
                   <a:srgbClr val="0B1020"/>
                 </a:solidFill>
@@ -11404,8 +11513,8 @@
         </p:nvSpPr>
         <p:spPr>
           <a:xfrm>
-            <a:off x="6245352" y="3529584"/>
-            <a:ext cx="5486400" cy="1600200"/>
+            <a:off x="6245352" y="3410712"/>
+            <a:ext cx="5486400" cy="1481328"/>
           </a:xfrm>
           <a:prstGeom prst="roundRect">
             <a:avLst>
@@ -11449,7 +11558,7 @@
               </a:spcAft>
             </a:pPr>
             <a:r>
-              <a:rPr sz="1100" b="1">
+              <a:rPr sz="1150" b="1">
                 <a:solidFill>
                   <a:srgbClr val="0B1020"/>
                 </a:solidFill>
@@ -11468,7 +11577,7 @@
               </a:spcAft>
             </a:pPr>
             <a:r>
-              <a:rPr sz="1200" b="0">
+              <a:rPr sz="1250" b="0">
                 <a:solidFill>
                   <a:srgbClr val="0B1020"/>
                 </a:solidFill>
@@ -12014,7 +12123,7 @@
         <p:spPr>
           <a:xfrm>
             <a:off x="457200" y="1627632"/>
-            <a:ext cx="2706624" cy="2148840"/>
+            <a:ext cx="2706624" cy="1874519"/>
           </a:xfrm>
           <a:prstGeom prst="roundRect">
             <a:avLst>
@@ -12058,7 +12167,7 @@
               </a:spcAft>
             </a:pPr>
             <a:r>
-              <a:rPr sz="1000" b="1">
+              <a:rPr sz="1050" b="1">
                 <a:solidFill>
                   <a:srgbClr val="0B1020"/>
                 </a:solidFill>
@@ -12077,7 +12186,7 @@
               </a:spcAft>
             </a:pPr>
             <a:r>
-              <a:rPr sz="1100" b="0">
+              <a:rPr sz="1150" b="0">
                 <a:solidFill>
                   <a:srgbClr val="0B1020"/>
                 </a:solidFill>
@@ -12097,7 +12206,7 @@
         <p:spPr>
           <a:xfrm>
             <a:off x="3337560" y="1627632"/>
-            <a:ext cx="2706624" cy="2148840"/>
+            <a:ext cx="2706624" cy="1874519"/>
           </a:xfrm>
           <a:prstGeom prst="roundRect">
             <a:avLst>
@@ -12141,7 +12250,7 @@
               </a:spcAft>
             </a:pPr>
             <a:r>
-              <a:rPr sz="1000" b="1">
+              <a:rPr sz="1050" b="1">
                 <a:solidFill>
                   <a:srgbClr val="0B1020"/>
                 </a:solidFill>
@@ -12160,7 +12269,7 @@
               </a:spcAft>
             </a:pPr>
             <a:r>
-              <a:rPr sz="1100" b="0">
+              <a:rPr sz="1150" b="0">
                 <a:solidFill>
                   <a:srgbClr val="0B1020"/>
                 </a:solidFill>
@@ -12180,7 +12289,7 @@
         <p:spPr>
           <a:xfrm>
             <a:off x="6217920" y="1627632"/>
-            <a:ext cx="2706624" cy="2148840"/>
+            <a:ext cx="2706624" cy="1874519"/>
           </a:xfrm>
           <a:prstGeom prst="roundRect">
             <a:avLst>
@@ -12224,7 +12333,7 @@
               </a:spcAft>
             </a:pPr>
             <a:r>
-              <a:rPr sz="1000" b="1">
+              <a:rPr sz="1050" b="1">
                 <a:solidFill>
                   <a:srgbClr val="0B1020"/>
                 </a:solidFill>
@@ -12243,7 +12352,7 @@
               </a:spcAft>
             </a:pPr>
             <a:r>
-              <a:rPr sz="1100" b="0">
+              <a:rPr sz="1150" b="0">
                 <a:solidFill>
                   <a:srgbClr val="0B1020"/>
                 </a:solidFill>
@@ -12263,7 +12372,7 @@
         <p:spPr>
           <a:xfrm>
             <a:off x="9098280" y="1627632"/>
-            <a:ext cx="2706624" cy="2148840"/>
+            <a:ext cx="2706624" cy="1874519"/>
           </a:xfrm>
           <a:prstGeom prst="roundRect">
             <a:avLst>
@@ -12307,7 +12416,7 @@
               </a:spcAft>
             </a:pPr>
             <a:r>
-              <a:rPr sz="1000" b="1">
+              <a:rPr sz="1050" b="1">
                 <a:solidFill>
                   <a:srgbClr val="0B1020"/>
                 </a:solidFill>
@@ -12326,7 +12435,7 @@
               </a:spcAft>
             </a:pPr>
             <a:r>
-              <a:rPr sz="1100" b="0">
+              <a:rPr sz="1150" b="0">
                 <a:solidFill>
                   <a:srgbClr val="0B1020"/>
                 </a:solidFill>
@@ -12345,8 +12454,8 @@
         </p:nvSpPr>
         <p:spPr>
           <a:xfrm>
-            <a:off x="457200" y="4041648"/>
-            <a:ext cx="11274552" cy="960120"/>
+            <a:off x="457200" y="3794760"/>
+            <a:ext cx="11274552" cy="1051560"/>
           </a:xfrm>
           <a:prstGeom prst="roundRect">
             <a:avLst>
@@ -12428,8 +12537,8 @@
         </p:nvSpPr>
         <p:spPr>
           <a:xfrm>
-            <a:off x="457200" y="5230368"/>
-            <a:ext cx="11274552" cy="640080"/>
+            <a:off x="457200" y="5074920"/>
+            <a:ext cx="11274552" cy="685800"/>
           </a:xfrm>
           <a:prstGeom prst="rect">
             <a:avLst/>
@@ -14091,7 +14200,7 @@
         <p:spPr>
           <a:xfrm>
             <a:off x="457200" y="1600200"/>
-            <a:ext cx="2176272" cy="2606040"/>
+            <a:ext cx="2176272" cy="2514600"/>
           </a:xfrm>
           <a:prstGeom prst="roundRect">
             <a:avLst>
@@ -14135,7 +14244,7 @@
               </a:spcAft>
             </a:pPr>
             <a:r>
-              <a:rPr sz="1000" b="1">
+              <a:rPr sz="1050" b="1">
                 <a:solidFill>
                   <a:srgbClr val="0B1020"/>
                 </a:solidFill>
@@ -14154,7 +14263,7 @@
               </a:spcAft>
             </a:pPr>
             <a:r>
-              <a:rPr sz="1100" b="0">
+              <a:rPr sz="1150" b="0">
                 <a:solidFill>
                   <a:srgbClr val="0B1020"/>
                 </a:solidFill>
@@ -14174,7 +14283,7 @@
         <p:spPr>
           <a:xfrm>
             <a:off x="2734056" y="1600200"/>
-            <a:ext cx="2176272" cy="2606040"/>
+            <a:ext cx="2176272" cy="2514600"/>
           </a:xfrm>
           <a:prstGeom prst="roundRect">
             <a:avLst>
@@ -14218,7 +14327,7 @@
               </a:spcAft>
             </a:pPr>
             <a:r>
-              <a:rPr sz="1000" b="1">
+              <a:rPr sz="1050" b="1">
                 <a:solidFill>
                   <a:srgbClr val="0B1020"/>
                 </a:solidFill>
@@ -14237,7 +14346,7 @@
               </a:spcAft>
             </a:pPr>
             <a:r>
-              <a:rPr sz="1100" b="0">
+              <a:rPr sz="1150" b="0">
                 <a:solidFill>
                   <a:srgbClr val="0B1020"/>
                 </a:solidFill>
@@ -14257,7 +14366,7 @@
         <p:spPr>
           <a:xfrm>
             <a:off x="5010912" y="1600200"/>
-            <a:ext cx="2176272" cy="2606040"/>
+            <a:ext cx="2176272" cy="2514600"/>
           </a:xfrm>
           <a:prstGeom prst="roundRect">
             <a:avLst>
@@ -14301,7 +14410,7 @@
               </a:spcAft>
             </a:pPr>
             <a:r>
-              <a:rPr sz="1000" b="1">
+              <a:rPr sz="1050" b="1">
                 <a:solidFill>
                   <a:srgbClr val="0B1020"/>
                 </a:solidFill>
@@ -14320,7 +14429,7 @@
               </a:spcAft>
             </a:pPr>
             <a:r>
-              <a:rPr sz="1100" b="0">
+              <a:rPr sz="1150" b="0">
                 <a:solidFill>
                   <a:srgbClr val="0B1020"/>
                 </a:solidFill>
@@ -14340,7 +14449,7 @@
         <p:spPr>
           <a:xfrm>
             <a:off x="7287767" y="1600200"/>
-            <a:ext cx="2176272" cy="2606040"/>
+            <a:ext cx="2176272" cy="2514600"/>
           </a:xfrm>
           <a:prstGeom prst="roundRect">
             <a:avLst>
@@ -14384,7 +14493,7 @@
               </a:spcAft>
             </a:pPr>
             <a:r>
-              <a:rPr sz="1000" b="1">
+              <a:rPr sz="1050" b="1">
                 <a:solidFill>
                   <a:srgbClr val="0B1020"/>
                 </a:solidFill>
@@ -14403,7 +14512,7 @@
               </a:spcAft>
             </a:pPr>
             <a:r>
-              <a:rPr sz="1100" b="0">
+              <a:rPr sz="1150" b="0">
                 <a:solidFill>
                   <a:srgbClr val="0B1020"/>
                 </a:solidFill>
@@ -14423,7 +14532,7 @@
         <p:spPr>
           <a:xfrm>
             <a:off x="9564624" y="1600200"/>
-            <a:ext cx="2176272" cy="2606040"/>
+            <a:ext cx="2176272" cy="2514600"/>
           </a:xfrm>
           <a:prstGeom prst="roundRect">
             <a:avLst>
@@ -14467,7 +14576,7 @@
               </a:spcAft>
             </a:pPr>
             <a:r>
-              <a:rPr sz="1000" b="1">
+              <a:rPr sz="1050" b="1">
                 <a:solidFill>
                   <a:srgbClr val="0B1020"/>
                 </a:solidFill>
@@ -14486,7 +14595,7 @@
               </a:spcAft>
             </a:pPr>
             <a:r>
-              <a:rPr sz="1100" b="0">
+              <a:rPr sz="1150" b="0">
                 <a:solidFill>
                   <a:srgbClr val="0B1020"/>
                 </a:solidFill>
@@ -14505,8 +14614,8 @@
         </p:nvSpPr>
         <p:spPr>
           <a:xfrm>
-            <a:off x="457200" y="4434840"/>
-            <a:ext cx="11274552" cy="1234440"/>
+            <a:off x="457200" y="4343400"/>
+            <a:ext cx="11274552" cy="1371600"/>
           </a:xfrm>
           <a:prstGeom prst="roundRect">
             <a:avLst>
@@ -14550,7 +14659,7 @@
               </a:spcAft>
             </a:pPr>
             <a:r>
-              <a:rPr sz="1050" b="1">
+              <a:rPr sz="1100" b="1">
                 <a:solidFill>
                   <a:srgbClr val="0B1020"/>
                 </a:solidFill>
@@ -14569,7 +14678,7 @@
               </a:spcAft>
             </a:pPr>
             <a:r>
-              <a:rPr sz="1200" b="0">
+              <a:rPr sz="1250" b="0">
                 <a:solidFill>
                   <a:srgbClr val="0B1020"/>
                 </a:solidFill>
@@ -14588,7 +14697,7 @@
               </a:spcAft>
             </a:pPr>
             <a:r>
-              <a:rPr sz="1200" b="0">
+              <a:rPr sz="1250" b="0">
                 <a:solidFill>
                   <a:srgbClr val="0B1020"/>
                 </a:solidFill>
@@ -15071,7 +15180,7 @@
         <p:spPr>
           <a:xfrm>
             <a:off x="457200" y="694944"/>
-            <a:ext cx="6858000" cy="658368"/>
+            <a:ext cx="11274552" cy="658368"/>
           </a:xfrm>
           <a:prstGeom prst="rect">
             <a:avLst/>
@@ -17407,7 +17516,7 @@
         <p:spPr>
           <a:xfrm>
             <a:off x="457200" y="1627632"/>
-            <a:ext cx="5486400" cy="1600200"/>
+            <a:ext cx="5486400" cy="1481328"/>
           </a:xfrm>
           <a:prstGeom prst="roundRect">
             <a:avLst>
@@ -17451,7 +17560,7 @@
               </a:spcAft>
             </a:pPr>
             <a:r>
-              <a:rPr sz="1100" b="1">
+              <a:rPr sz="1150" b="1">
                 <a:solidFill>
                   <a:srgbClr val="0B1020"/>
                 </a:solidFill>
@@ -17470,7 +17579,7 @@
               </a:spcAft>
             </a:pPr>
             <a:r>
-              <a:rPr sz="1200" b="0">
+              <a:rPr sz="1250" b="0">
                 <a:solidFill>
                   <a:srgbClr val="0B1020"/>
                 </a:solidFill>
@@ -17490,7 +17599,7 @@
         <p:spPr>
           <a:xfrm>
             <a:off x="6245352" y="1627632"/>
-            <a:ext cx="5486400" cy="1600200"/>
+            <a:ext cx="5486400" cy="1481328"/>
           </a:xfrm>
           <a:prstGeom prst="roundRect">
             <a:avLst>
@@ -17534,7 +17643,7 @@
               </a:spcAft>
             </a:pPr>
             <a:r>
-              <a:rPr sz="1100" b="1">
+              <a:rPr sz="1150" b="1">
                 <a:solidFill>
                   <a:srgbClr val="0B1020"/>
                 </a:solidFill>
@@ -17553,7 +17662,7 @@
               </a:spcAft>
             </a:pPr>
             <a:r>
-              <a:rPr sz="1200" b="0">
+              <a:rPr sz="1250" b="0">
                 <a:solidFill>
                   <a:srgbClr val="0B1020"/>
                 </a:solidFill>
@@ -17572,8 +17681,8 @@
         </p:nvSpPr>
         <p:spPr>
           <a:xfrm>
-            <a:off x="457200" y="3529584"/>
-            <a:ext cx="5486400" cy="1600200"/>
+            <a:off x="457200" y="3410712"/>
+            <a:ext cx="5486400" cy="1481328"/>
           </a:xfrm>
           <a:prstGeom prst="roundRect">
             <a:avLst>
@@ -17617,7 +17726,7 @@
               </a:spcAft>
             </a:pPr>
             <a:r>
-              <a:rPr sz="1100" b="1">
+              <a:rPr sz="1150" b="1">
                 <a:solidFill>
                   <a:srgbClr val="0B1020"/>
                 </a:solidFill>
@@ -17636,7 +17745,7 @@
               </a:spcAft>
             </a:pPr>
             <a:r>
-              <a:rPr sz="1200" b="0">
+              <a:rPr sz="1250" b="0">
                 <a:solidFill>
                   <a:srgbClr val="0B1020"/>
                 </a:solidFill>
@@ -17655,8 +17764,8 @@
         </p:nvSpPr>
         <p:spPr>
           <a:xfrm>
-            <a:off x="6245352" y="3529584"/>
-            <a:ext cx="5486400" cy="1600200"/>
+            <a:off x="6245352" y="3410712"/>
+            <a:ext cx="5486400" cy="1481328"/>
           </a:xfrm>
           <a:prstGeom prst="roundRect">
             <a:avLst>
@@ -17700,7 +17809,7 @@
               </a:spcAft>
             </a:pPr>
             <a:r>
-              <a:rPr sz="1100" b="1">
+              <a:rPr sz="1150" b="1">
                 <a:solidFill>
                   <a:srgbClr val="0B1020"/>
                 </a:solidFill>
@@ -17719,7 +17828,7 @@
               </a:spcAft>
             </a:pPr>
             <a:r>
-              <a:rPr sz="1200" b="0">
+              <a:rPr sz="1250" b="0">
                 <a:solidFill>
                   <a:srgbClr val="0B1020"/>
                 </a:solidFill>
@@ -18207,7 +18316,7 @@
         <p:spPr>
           <a:xfrm>
             <a:off x="457200" y="694944"/>
-            <a:ext cx="8229600" cy="658368"/>
+            <a:ext cx="11274552" cy="658368"/>
           </a:xfrm>
           <a:prstGeom prst="rect">
             <a:avLst/>
